--- a/templates/posts/october/_templates/3-checklist-yes-no.pptx
+++ b/templates/posts/october/_templates/3-checklist-yes-no.pptx
@@ -3717,7 +3717,7 @@
     <p:bg>
       <p:bgPr>
         <a:solidFill>
-          <a:srgbClr val="F4F1EA"/>
+          <a:srgbClr val="F3F1EA"/>
         </a:solidFill>
         <a:effectLst/>
       </p:bgPr>
@@ -3746,7 +3746,7 @@
             </a:avLst>
           </a:prstGeom>
           <a:solidFill>
-            <a:srgbClr val="156826"/>
+            <a:srgbClr val="31662F"/>
           </a:solidFill>
           <a:ln>
             <a:noFill/>
@@ -3805,7 +3805,7 @@
             <a:r>
               <a:rPr sz="2000" b="1" i="0" spc="200">
                 <a:solidFill>
-                  <a:srgbClr val="F4F1EA"/>
+                  <a:srgbClr val="F3F1EA"/>
                 </a:solidFill>
                 <a:latin typeface="Montserrat"/>
               </a:rPr>
@@ -3844,7 +3844,7 @@
             <a:r>
               <a:rPr sz="6400" b="1" i="0">
                 <a:solidFill>
-                  <a:srgbClr val="22371F"/>
+                  <a:srgbClr val="1E3F1D"/>
                 </a:solidFill>
                 <a:latin typeface="Montserrat"/>
               </a:rPr>
@@ -4248,7 +4248,7 @@
     <p:bg>
       <p:bgPr>
         <a:solidFill>
-          <a:srgbClr val="F4F1EA"/>
+          <a:srgbClr val="F3F1EA"/>
         </a:solidFill>
         <a:effectLst/>
       </p:bgPr>
@@ -4360,7 +4360,7 @@
             <a:avLst/>
           </a:prstGeom>
           <a:solidFill>
-            <a:srgbClr val="59A66C"/>
+            <a:srgbClr val="31662F"/>
           </a:solidFill>
           <a:ln>
             <a:noFill/>
@@ -4431,7 +4431,7 @@
             </a:pathLst>
           </a:custGeom>
           <a:solidFill>
-            <a:srgbClr val="F4F1EA"/>
+            <a:srgbClr val="F3F1EA"/>
           </a:solidFill>
           <a:ln>
             <a:noFill/>
@@ -4490,7 +4490,7 @@
             <a:r>
               <a:rPr sz="5600" b="1" i="0">
                 <a:solidFill>
-                  <a:srgbClr val="22371F"/>
+                  <a:srgbClr val="1E3F1D"/>
                 </a:solidFill>
                 <a:latin typeface="Montserrat"/>
               </a:rPr>
@@ -4593,7 +4593,7 @@
     <p:bg>
       <p:bgPr>
         <a:solidFill>
-          <a:srgbClr val="F4F1EA"/>
+          <a:srgbClr val="F3F1EA"/>
         </a:solidFill>
         <a:effectLst/>
       </p:bgPr>
@@ -4705,7 +4705,7 @@
             <a:avLst/>
           </a:prstGeom>
           <a:solidFill>
-            <a:srgbClr val="C9A227"/>
+            <a:srgbClr val="D39C48"/>
           </a:solidFill>
           <a:ln>
             <a:noFill/>
@@ -4764,7 +4764,7 @@
             <a:r>
               <a:rPr sz="6000" b="1" i="0">
                 <a:solidFill>
-                  <a:srgbClr val="22371F"/>
+                  <a:srgbClr val="1E3F1D"/>
                 </a:solidFill>
                 <a:latin typeface="Montserrat"/>
               </a:rPr>
@@ -4803,7 +4803,7 @@
             <a:r>
               <a:rPr sz="5600" b="1" i="0">
                 <a:solidFill>
-                  <a:srgbClr val="22371F"/>
+                  <a:srgbClr val="1E3F1D"/>
                 </a:solidFill>
                 <a:latin typeface="Montserrat"/>
               </a:rPr>
@@ -4906,7 +4906,7 @@
     <p:bg>
       <p:bgPr>
         <a:solidFill>
-          <a:srgbClr val="F4F1EA"/>
+          <a:srgbClr val="F3F1EA"/>
         </a:solidFill>
         <a:effectLst/>
       </p:bgPr>
@@ -4948,7 +4948,7 @@
             <a:r>
               <a:rPr sz="2200" b="1" i="0" spc="200">
                 <a:solidFill>
-                  <a:srgbClr val="156826"/>
+                  <a:srgbClr val="31662F"/>
                 </a:solidFill>
                 <a:latin typeface="Montserrat"/>
               </a:rPr>
@@ -4972,7 +4972,7 @@
             <a:avLst/>
           </a:prstGeom>
           <a:solidFill>
-            <a:srgbClr val="156826"/>
+            <a:srgbClr val="31662F"/>
           </a:solidFill>
           <a:ln>
             <a:noFill/>
@@ -5031,7 +5031,7 @@
             <a:r>
               <a:rPr sz="3400" b="1" i="0">
                 <a:solidFill>
-                  <a:srgbClr val="F4F1EA"/>
+                  <a:srgbClr val="F3F1EA"/>
                 </a:solidFill>
                 <a:latin typeface="Montserrat"/>
               </a:rPr>
@@ -5070,7 +5070,7 @@
             <a:r>
               <a:rPr sz="3800" b="0" i="0">
                 <a:solidFill>
-                  <a:srgbClr val="22371F"/>
+                  <a:srgbClr val="1E3F1D"/>
                 </a:solidFill>
                 <a:latin typeface="Source Sans 3"/>
               </a:rPr>
@@ -5094,7 +5094,7 @@
             <a:avLst/>
           </a:prstGeom>
           <a:solidFill>
-            <a:srgbClr val="156826"/>
+            <a:srgbClr val="31662F"/>
           </a:solidFill>
           <a:ln>
             <a:noFill/>
@@ -5153,7 +5153,7 @@
             <a:r>
               <a:rPr sz="3400" b="1" i="0">
                 <a:solidFill>
-                  <a:srgbClr val="F4F1EA"/>
+                  <a:srgbClr val="F3F1EA"/>
                 </a:solidFill>
                 <a:latin typeface="Montserrat"/>
               </a:rPr>
@@ -5192,7 +5192,7 @@
             <a:r>
               <a:rPr sz="3800" b="0" i="0">
                 <a:solidFill>
-                  <a:srgbClr val="22371F"/>
+                  <a:srgbClr val="1E3F1D"/>
                 </a:solidFill>
                 <a:latin typeface="Source Sans 3"/>
               </a:rPr>
@@ -5216,7 +5216,7 @@
             <a:avLst/>
           </a:prstGeom>
           <a:solidFill>
-            <a:srgbClr val="156826"/>
+            <a:srgbClr val="31662F"/>
           </a:solidFill>
           <a:ln>
             <a:noFill/>
@@ -5275,7 +5275,7 @@
             <a:r>
               <a:rPr sz="3400" b="1" i="0">
                 <a:solidFill>
-                  <a:srgbClr val="F4F1EA"/>
+                  <a:srgbClr val="F3F1EA"/>
                 </a:solidFill>
                 <a:latin typeface="Montserrat"/>
               </a:rPr>
@@ -5314,7 +5314,7 @@
             <a:r>
               <a:rPr sz="3800" b="0" i="0">
                 <a:solidFill>
-                  <a:srgbClr val="22371F"/>
+                  <a:srgbClr val="1E3F1D"/>
                 </a:solidFill>
                 <a:latin typeface="Source Sans 3"/>
               </a:rPr>
